--- a/templates/07-business-cases-template.pptx
+++ b/templates/07-business-cases-template.pptx
@@ -3558,7 +3558,7 @@
         <p:spPr>
           <a:xfrm>
             <a:off x="457200" y="1207008"/>
-            <a:ext cx="2743200" cy="182880"/>
+            <a:ext cx="11277295" cy="274320"/>
           </a:xfrm>
           <a:prstGeom prst="rect">
             <a:avLst/>
@@ -3574,13 +3574,13 @@
           <a:p>
             <a:pPr algn="l"/>
             <a:r>
-              <a:rPr lang="en-AU" sz="800" b="1" dirty="0">
+              <a:rPr lang="en-AU" sz="1250" b="1" dirty="0">
                 <a:solidFill>
-                  <a:srgbClr val="6B6A66"/>
+                  <a:srgbClr val="184F95"/>
                 </a:solidFill>
                 <a:latin typeface="Aptos"/>
               </a:rPr>
-              <a:t>HOW TO FILL IT IN</a:t>
+              <a:t>Business Cases — blank template</a:t>
             </a:r>
           </a:p>
         </p:txBody>
@@ -3593,8 +3593,8 @@
         </p:nvSpPr>
         <p:spPr>
           <a:xfrm>
-            <a:off x="457200" y="1408176"/>
-            <a:ext cx="2743200" cy="914400"/>
+            <a:off x="457200" y="6089904"/>
+            <a:ext cx="11277295" cy="347472"/>
           </a:xfrm>
           <a:prstGeom prst="rect">
             <a:avLst/>
@@ -3610,275 +3610,27 @@
           <a:p>
             <a:pPr algn="l"/>
             <a:r>
-              <a:rPr lang="en-AU" sz="950" dirty="0">
-                <a:solidFill>
-                  <a:srgbClr val="0B0B0B"/>
-                </a:solidFill>
-                <a:latin typeface="Aptos"/>
-              </a:rPr>
-              <a:t>Panels are fixed. An empty panel is a finding, not an omission.</a:t>
-            </a:r>
-          </a:p>
-        </p:txBody>
-      </p:sp>
-      <p:sp>
-        <p:nvSpPr>
-          <p:cNvPr id="31" name="shape31"/>
-          <p:cNvSpPr/>
-          <p:nvPr/>
-        </p:nvSpPr>
-        <p:spPr>
-          <a:xfrm>
-            <a:off x="457200" y="2414016"/>
-            <a:ext cx="2743200" cy="182880"/>
-          </a:xfrm>
-          <a:prstGeom prst="rect">
-            <a:avLst/>
-          </a:prstGeom>
-          <a:noFill/>
-          <a:ln>
-            <a:noFill/>
-          </a:ln>
-        </p:spPr>
-        <p:txBody>
-          <a:bodyPr wrap="square" anchor="b" lIns="0" rIns="0" tIns="27432" bIns="27432"/>
-          <a:lstStyle/>
-          <a:p>
-            <a:pPr algn="l"/>
-            <a:r>
-              <a:rPr lang="en-AU" sz="800" b="1" dirty="0">
+              <a:rPr lang="en-AU" sz="850" dirty="0">
                 <a:solidFill>
                   <a:srgbClr val="6B6A66"/>
                 </a:solidFill>
                 <a:latin typeface="Aptos"/>
               </a:rPr>
-              <a:t>WHAT IT IS FOR</a:t>
-            </a:r>
-          </a:p>
-        </p:txBody>
-      </p:sp>
-      <p:sp>
-        <p:nvSpPr>
-          <p:cNvPr id="32" name="shape32"/>
+              <a:t>Panels are fixed. An empty panel is a finding, not an omission.</a:t>
+            </a:r>
+          </a:p>
+        </p:txBody>
+      </p:sp>
+      <p:sp>
+        <p:nvSpPr>
+          <p:cNvPr id="31" name="shape31"/>
           <p:cNvSpPr/>
           <p:nvPr/>
         </p:nvSpPr>
         <p:spPr>
           <a:xfrm>
-            <a:off x="457200" y="2615184"/>
-            <a:ext cx="2743200" cy="731520"/>
-          </a:xfrm>
-          <a:prstGeom prst="rect">
-            <a:avLst/>
-          </a:prstGeom>
-          <a:noFill/>
-          <a:ln>
-            <a:noFill/>
-          </a:ln>
-        </p:spPr>
-        <p:txBody>
-          <a:bodyPr wrap="square" anchor="t" lIns="0" rIns="0" tIns="27432" bIns="27432"/>
-          <a:lstStyle/>
-          <a:p>
-            <a:pPr algn="l"/>
-            <a:r>
-              <a:rPr lang="en-AU" sz="950" dirty="0">
-                <a:solidFill>
-                  <a:srgbClr val="0B0B0B"/>
-                </a:solidFill>
-                <a:latin typeface="Aptos"/>
-              </a:rPr>
-              <a:t>Assembles the justification for a change: the need, the options considered, the recommended option and what it is expected to be worth.</a:t>
-            </a:r>
-          </a:p>
-        </p:txBody>
-      </p:sp>
-      <p:sp>
-        <p:nvSpPr>
-          <p:cNvPr id="33" name="shape33"/>
-          <p:cNvSpPr/>
-          <p:nvPr/>
-        </p:nvSpPr>
-        <p:spPr>
-          <a:xfrm>
-            <a:off x="457200" y="3438144"/>
-            <a:ext cx="2743200" cy="182880"/>
-          </a:xfrm>
-          <a:prstGeom prst="rect">
-            <a:avLst/>
-          </a:prstGeom>
-          <a:noFill/>
-          <a:ln>
-            <a:noFill/>
-          </a:ln>
-        </p:spPr>
-        <p:txBody>
-          <a:bodyPr wrap="square" anchor="b" lIns="0" rIns="0" tIns="27432" bIns="27432"/>
-          <a:lstStyle/>
-          <a:p>
-            <a:pPr algn="l"/>
-            <a:r>
-              <a:rPr lang="en-AU" sz="800" b="1" dirty="0">
-                <a:solidFill>
-                  <a:srgbClr val="6B6A66"/>
-                </a:solidFill>
-                <a:latin typeface="Aptos"/>
-              </a:rPr>
-              <a:t>MOST OFTEN CONFUSED WITH</a:t>
-            </a:r>
-          </a:p>
-        </p:txBody>
-      </p:sp>
-      <p:sp>
-        <p:nvSpPr>
-          <p:cNvPr id="34" name="shape34"/>
-          <p:cNvSpPr/>
-          <p:nvPr/>
-        </p:nvSpPr>
-        <p:spPr>
-          <a:xfrm>
-            <a:off x="457200" y="3639312"/>
-            <a:ext cx="2743200" cy="1737360"/>
-          </a:xfrm>
-          <a:prstGeom prst="rect">
-            <a:avLst/>
-          </a:prstGeom>
-          <a:solidFill>
-            <a:srgbClr val="F7F7F5"/>
-          </a:solidFill>
-          <a:ln>
-            <a:noFill/>
-          </a:ln>
-        </p:spPr>
-        <p:txBody>
-          <a:bodyPr wrap="square" anchor="t" lIns="91440" rIns="91440" tIns="27432" bIns="27432"/>
-          <a:lstStyle/>
-          <a:p>
-            <a:pPr algn="l"/>
-            <a:r>
-              <a:rPr lang="en-AU" sz="900" dirty="0">
-                <a:solidFill>
-                  <a:srgbClr val="0B0B0B"/>
-                </a:solidFill>
-                <a:latin typeface="Aptos"/>
-              </a:rPr>
-              <a:t>The business case is the container; financial analysis is one of its contents. An item that turns on how the return was calculated is financial analysis, while one that turns on whether the recommendation was justified at all is the business case.</a:t>
-            </a:r>
-          </a:p>
-        </p:txBody>
-      </p:sp>
-      <p:sp>
-        <p:nvSpPr>
-          <p:cNvPr id="35" name="shape35"/>
-          <p:cNvSpPr/>
-          <p:nvPr/>
-        </p:nvSpPr>
-        <p:spPr>
-          <a:xfrm>
-            <a:off x="457200" y="3639312"/>
-            <a:ext cx="32004" cy="1737360"/>
-          </a:xfrm>
-          <a:prstGeom prst="rect">
-            <a:avLst/>
-          </a:prstGeom>
-          <a:solidFill>
-            <a:srgbClr val="FAB219"/>
-          </a:solidFill>
-          <a:ln>
-            <a:noFill/>
-          </a:ln>
-        </p:spPr>
-        <p:txBody>
-          <a:bodyPr wrap="square" anchor="ctr" lIns="54864" rIns="54864" tIns="27432" bIns="27432"/>
-          <a:lstStyle/>
-          <a:p>
-            <a:pPr algn="l"/>
-            <a:endParaRPr lang="en-AU" sz="1100"/>
-          </a:p>
-        </p:txBody>
-      </p:sp>
-      <p:sp>
-        <p:nvSpPr>
-          <p:cNvPr id="36" name="shape36"/>
-          <p:cNvSpPr/>
-          <p:nvPr/>
-        </p:nvSpPr>
-        <p:spPr>
-          <a:xfrm>
-            <a:off x="457200" y="5486400"/>
-            <a:ext cx="2743200" cy="502920"/>
-          </a:xfrm>
-          <a:prstGeom prst="rect">
-            <a:avLst/>
-          </a:prstGeom>
-          <a:noFill/>
-          <a:ln>
-            <a:noFill/>
-          </a:ln>
-        </p:spPr>
-        <p:txBody>
-          <a:bodyPr wrap="square" anchor="t" lIns="0" rIns="0" tIns="27432" bIns="27432"/>
-          <a:lstStyle/>
-          <a:p>
-            <a:pPr algn="l"/>
-            <a:r>
-              <a:rPr lang="en-AU" sz="800" dirty="0">
-                <a:solidFill>
-                  <a:srgbClr val="6B6A66"/>
-                </a:solidFill>
-                <a:latin typeface="Aptos"/>
-              </a:rPr>
-              <a:t>Tasks: 6.4 Define Change Strategy · 6.2 Define Future State · 7.6 Analyze Potential Value and Recommend Solution</a:t>
-            </a:r>
-          </a:p>
-        </p:txBody>
-      </p:sp>
-      <p:sp>
-        <p:nvSpPr>
-          <p:cNvPr id="37" name="shape37"/>
-          <p:cNvSpPr/>
-          <p:nvPr/>
-        </p:nvSpPr>
-        <p:spPr>
-          <a:xfrm>
-            <a:off x="3520440" y="1188720"/>
-            <a:ext cx="8214055" cy="237744"/>
-          </a:xfrm>
-          <a:prstGeom prst="rect">
-            <a:avLst/>
-          </a:prstGeom>
-          <a:noFill/>
-          <a:ln>
-            <a:noFill/>
-          </a:ln>
-        </p:spPr>
-        <p:txBody>
-          <a:bodyPr wrap="square" anchor="b" lIns="0" rIns="0" tIns="27432" bIns="27432"/>
-          <a:lstStyle/>
-          <a:p>
-            <a:pPr algn="l"/>
-            <a:r>
-              <a:rPr lang="en-AU" sz="1050" b="1" dirty="0">
-                <a:solidFill>
-                  <a:srgbClr val="184F95"/>
-                </a:solidFill>
-                <a:latin typeface="Aptos"/>
-              </a:rPr>
-              <a:t>Business Cases — blank template</a:t>
-            </a:r>
-          </a:p>
-        </p:txBody>
-      </p:sp>
-      <p:sp>
-        <p:nvSpPr>
-          <p:cNvPr id="38" name="shape38"/>
-          <p:cNvSpPr/>
-          <p:nvPr/>
-        </p:nvSpPr>
-        <p:spPr>
-          <a:xfrm>
-            <a:off x="3547872" y="1527048"/>
-            <a:ext cx="4052164" cy="1286256"/>
+            <a:off x="484632" y="1728216"/>
+            <a:ext cx="5583784" cy="1444752"/>
           </a:xfrm>
           <a:prstGeom prst="rect">
             <a:avLst/>
@@ -3915,14 +3667,14 @@
       </p:sp>
       <p:sp>
         <p:nvSpPr>
-          <p:cNvPr id="39" name="shape39"/>
+          <p:cNvPr id="32" name="shape32"/>
           <p:cNvSpPr/>
           <p:nvPr/>
         </p:nvSpPr>
         <p:spPr>
           <a:xfrm>
-            <a:off x="7654900" y="1527048"/>
-            <a:ext cx="4052164" cy="1286256"/>
+            <a:off x="6123280" y="1728216"/>
+            <a:ext cx="5583784" cy="1444752"/>
           </a:xfrm>
           <a:prstGeom prst="rect">
             <a:avLst/>
@@ -3959,14 +3711,14 @@
       </p:sp>
       <p:sp>
         <p:nvSpPr>
-          <p:cNvPr id="40" name="shape40"/>
+          <p:cNvPr id="33" name="shape33"/>
           <p:cNvSpPr/>
           <p:nvPr/>
         </p:nvSpPr>
         <p:spPr>
           <a:xfrm>
-            <a:off x="3547872" y="2868168"/>
-            <a:ext cx="4052164" cy="1286256"/>
+            <a:off x="484632" y="3227832"/>
+            <a:ext cx="5583784" cy="1444752"/>
           </a:xfrm>
           <a:prstGeom prst="rect">
             <a:avLst/>
@@ -4003,14 +3755,14 @@
       </p:sp>
       <p:sp>
         <p:nvSpPr>
-          <p:cNvPr id="41" name="shape41"/>
+          <p:cNvPr id="34" name="shape34"/>
           <p:cNvSpPr/>
           <p:nvPr/>
         </p:nvSpPr>
         <p:spPr>
           <a:xfrm>
-            <a:off x="7654900" y="2868168"/>
-            <a:ext cx="4052164" cy="1286256"/>
+            <a:off x="6123280" y="3227832"/>
+            <a:ext cx="5583784" cy="1444752"/>
           </a:xfrm>
           <a:prstGeom prst="rect">
             <a:avLst/>
@@ -4047,14 +3799,14 @@
       </p:sp>
       <p:sp>
         <p:nvSpPr>
-          <p:cNvPr id="42" name="shape42"/>
+          <p:cNvPr id="35" name="shape35"/>
           <p:cNvSpPr/>
           <p:nvPr/>
         </p:nvSpPr>
         <p:spPr>
           <a:xfrm>
-            <a:off x="3547872" y="4209288"/>
-            <a:ext cx="4052164" cy="1286256"/>
+            <a:off x="484632" y="4727448"/>
+            <a:ext cx="5583784" cy="1444752"/>
           </a:xfrm>
           <a:prstGeom prst="rect">
             <a:avLst/>
@@ -4091,14 +3843,14 @@
       </p:sp>
       <p:sp>
         <p:nvSpPr>
-          <p:cNvPr id="43" name="shape43"/>
+          <p:cNvPr id="36" name="shape36"/>
           <p:cNvSpPr/>
           <p:nvPr/>
         </p:nvSpPr>
         <p:spPr>
           <a:xfrm>
-            <a:off x="7654900" y="4209288"/>
-            <a:ext cx="4052164" cy="1286256"/>
+            <a:off x="6123280" y="4727448"/>
+            <a:ext cx="5583784" cy="1444752"/>
           </a:xfrm>
           <a:prstGeom prst="rect">
             <a:avLst/>
